--- a/figuras/figuras.pptx
+++ b/figuras/figuras.pptx
@@ -3372,7 +3372,7 @@
         </p:blipFill>
         <p:spPr>
           <a:xfrm>
-            <a:off x="0" y="0"/>
+            <a:off x="14868" y="101600"/>
             <a:ext cx="9878712" cy="6858000"/>
           </a:xfrm>
           <a:prstGeom prst="rect">
@@ -3449,6 +3449,9 @@
                 <a:solidFill>
                   <a:schemeClr val="bg1"/>
                 </a:solidFill>
+                <a:highlight>
+                  <a:srgbClr val="C0C0C0"/>
+                </a:highlight>
               </a:rPr>
               <a:t>SDC</a:t>
             </a:r>
@@ -3488,6 +3491,9 @@
                 <a:solidFill>
                   <a:schemeClr val="bg1"/>
                 </a:solidFill>
+                <a:highlight>
+                  <a:srgbClr val="C0C0C0"/>
+                </a:highlight>
               </a:rPr>
               <a:t>SFC</a:t>
             </a:r>
@@ -3527,6 +3533,9 @@
                 <a:solidFill>
                   <a:schemeClr val="bg1"/>
                 </a:solidFill>
+                <a:highlight>
+                  <a:srgbClr val="C0C0C0"/>
+                </a:highlight>
               </a:rPr>
               <a:t>VIS</a:t>
             </a:r>
@@ -3629,6 +3638,439 @@
           </a:fontRef>
         </p:style>
       </p:cxnSp>
+      <p:cxnSp>
+        <p:nvCxnSpPr>
+          <p:cNvPr id="3" name="Straight Arrow Connector 2">
+            <a:extLst>
+              <a:ext uri="{FF2B5EF4-FFF2-40B4-BE49-F238E27FC236}">
+                <a16:creationId xmlns:a16="http://schemas.microsoft.com/office/drawing/2014/main" id="{0F56E48C-B723-D80B-B8C8-1A8E0D2A104E}"/>
+              </a:ext>
+            </a:extLst>
+          </p:cNvPr>
+          <p:cNvCxnSpPr>
+            <a:cxnSpLocks/>
+          </p:cNvCxnSpPr>
+          <p:nvPr/>
+        </p:nvCxnSpPr>
+        <p:spPr>
+          <a:xfrm flipH="1">
+            <a:off x="4074564" y="3964682"/>
+            <a:ext cx="2264904" cy="186844"/>
+          </a:xfrm>
+          <a:prstGeom prst="straightConnector1">
+            <a:avLst/>
+          </a:prstGeom>
+          <a:ln>
+            <a:solidFill>
+              <a:schemeClr val="bg1"/>
+            </a:solidFill>
+            <a:prstDash val="sysDash"/>
+            <a:tailEnd type="triangle"/>
+          </a:ln>
+        </p:spPr>
+        <p:style>
+          <a:lnRef idx="2">
+            <a:schemeClr val="accent1"/>
+          </a:lnRef>
+          <a:fillRef idx="0">
+            <a:schemeClr val="accent1"/>
+          </a:fillRef>
+          <a:effectRef idx="1">
+            <a:schemeClr val="accent1"/>
+          </a:effectRef>
+          <a:fontRef idx="minor">
+            <a:schemeClr val="tx1"/>
+          </a:fontRef>
+        </p:style>
+      </p:cxnSp>
+      <p:sp>
+        <p:nvSpPr>
+          <p:cNvPr id="12" name="TextBox 11">
+            <a:extLst>
+              <a:ext uri="{FF2B5EF4-FFF2-40B4-BE49-F238E27FC236}">
+                <a16:creationId xmlns:a16="http://schemas.microsoft.com/office/drawing/2014/main" id="{75A1D36C-9F60-CA5D-5FA9-917745BC5048}"/>
+              </a:ext>
+            </a:extLst>
+          </p:cNvPr>
+          <p:cNvSpPr txBox="1"/>
+          <p:nvPr/>
+        </p:nvSpPr>
+        <p:spPr>
+          <a:xfrm>
+            <a:off x="6053370" y="3766131"/>
+            <a:ext cx="1360170" cy="246221"/>
+          </a:xfrm>
+          <a:prstGeom prst="rect">
+            <a:avLst/>
+          </a:prstGeom>
+          <a:noFill/>
+        </p:spPr>
+        <p:txBody>
+          <a:bodyPr wrap="square" rtlCol="0">
+            <a:spAutoFit/>
+          </a:bodyPr>
+          <a:lstStyle/>
+          <a:p>
+            <a:r>
+              <a:rPr lang="en-CL" sz="1000" dirty="0">
+                <a:solidFill>
+                  <a:schemeClr val="bg1"/>
+                </a:solidFill>
+              </a:rPr>
+              <a:t>Oceano</a:t>
+            </a:r>
+          </a:p>
+        </p:txBody>
+      </p:sp>
+      <p:cxnSp>
+        <p:nvCxnSpPr>
+          <p:cNvPr id="14" name="Straight Arrow Connector 13">
+            <a:extLst>
+              <a:ext uri="{FF2B5EF4-FFF2-40B4-BE49-F238E27FC236}">
+                <a16:creationId xmlns:a16="http://schemas.microsoft.com/office/drawing/2014/main" id="{9AB3735B-94A0-FA4A-5BAD-4C2C0E5E5564}"/>
+              </a:ext>
+            </a:extLst>
+          </p:cNvPr>
+          <p:cNvCxnSpPr>
+            <a:cxnSpLocks/>
+          </p:cNvCxnSpPr>
+          <p:nvPr/>
+        </p:nvCxnSpPr>
+        <p:spPr>
+          <a:xfrm flipH="1">
+            <a:off x="6397102" y="4170557"/>
+            <a:ext cx="1132452" cy="21361"/>
+          </a:xfrm>
+          <a:prstGeom prst="straightConnector1">
+            <a:avLst/>
+          </a:prstGeom>
+          <a:ln w="28575">
+            <a:solidFill>
+              <a:schemeClr val="bg1"/>
+            </a:solidFill>
+            <a:prstDash val="sysDot"/>
+            <a:tailEnd type="triangle"/>
+          </a:ln>
+        </p:spPr>
+        <p:style>
+          <a:lnRef idx="2">
+            <a:schemeClr val="accent1"/>
+          </a:lnRef>
+          <a:fillRef idx="0">
+            <a:schemeClr val="accent1"/>
+          </a:fillRef>
+          <a:effectRef idx="1">
+            <a:schemeClr val="accent1"/>
+          </a:effectRef>
+          <a:fontRef idx="minor">
+            <a:schemeClr val="tx1"/>
+          </a:fontRef>
+        </p:style>
+      </p:cxnSp>
+      <p:cxnSp>
+        <p:nvCxnSpPr>
+          <p:cNvPr id="18" name="Straight Arrow Connector 17">
+            <a:extLst>
+              <a:ext uri="{FF2B5EF4-FFF2-40B4-BE49-F238E27FC236}">
+                <a16:creationId xmlns:a16="http://schemas.microsoft.com/office/drawing/2014/main" id="{96B68601-F216-BBC6-8080-68008ECBB7BE}"/>
+              </a:ext>
+            </a:extLst>
+          </p:cNvPr>
+          <p:cNvCxnSpPr>
+            <a:cxnSpLocks/>
+          </p:cNvCxnSpPr>
+          <p:nvPr/>
+        </p:nvCxnSpPr>
+        <p:spPr>
+          <a:xfrm>
+            <a:off x="1092899" y="3575135"/>
+            <a:ext cx="0" cy="553694"/>
+          </a:xfrm>
+          <a:prstGeom prst="straightConnector1">
+            <a:avLst/>
+          </a:prstGeom>
+          <a:ln>
+            <a:solidFill>
+              <a:schemeClr val="bg1"/>
+            </a:solidFill>
+            <a:prstDash val="sysDash"/>
+            <a:tailEnd type="triangle"/>
+          </a:ln>
+        </p:spPr>
+        <p:style>
+          <a:lnRef idx="2">
+            <a:schemeClr val="accent1"/>
+          </a:lnRef>
+          <a:fillRef idx="0">
+            <a:schemeClr val="accent1"/>
+          </a:fillRef>
+          <a:effectRef idx="1">
+            <a:schemeClr val="accent1"/>
+          </a:effectRef>
+          <a:fontRef idx="minor">
+            <a:schemeClr val="tx1"/>
+          </a:fontRef>
+        </p:style>
+      </p:cxnSp>
+      <p:sp>
+        <p:nvSpPr>
+          <p:cNvPr id="20" name="TextBox 19">
+            <a:extLst>
+              <a:ext uri="{FF2B5EF4-FFF2-40B4-BE49-F238E27FC236}">
+                <a16:creationId xmlns:a16="http://schemas.microsoft.com/office/drawing/2014/main" id="{AD5B821C-8309-2B8A-9FA0-C2894B0CF299}"/>
+              </a:ext>
+            </a:extLst>
+          </p:cNvPr>
+          <p:cNvSpPr txBox="1"/>
+          <p:nvPr/>
+        </p:nvSpPr>
+        <p:spPr>
+          <a:xfrm>
+            <a:off x="1054187" y="3688028"/>
+            <a:ext cx="1360170" cy="307777"/>
+          </a:xfrm>
+          <a:prstGeom prst="rect">
+            <a:avLst/>
+          </a:prstGeom>
+          <a:noFill/>
+        </p:spPr>
+        <p:txBody>
+          <a:bodyPr wrap="square" rtlCol="0">
+            <a:spAutoFit/>
+          </a:bodyPr>
+          <a:lstStyle/>
+          <a:p>
+            <a:r>
+              <a:rPr lang="en-CL" sz="1400" dirty="0">
+                <a:solidFill>
+                  <a:schemeClr val="bg1"/>
+                </a:solidFill>
+              </a:rPr>
+              <a:t>Rocío</a:t>
+            </a:r>
+          </a:p>
+        </p:txBody>
+      </p:sp>
+      <p:sp>
+        <p:nvSpPr>
+          <p:cNvPr id="21" name="TextBox 20">
+            <a:extLst>
+              <a:ext uri="{FF2B5EF4-FFF2-40B4-BE49-F238E27FC236}">
+                <a16:creationId xmlns:a16="http://schemas.microsoft.com/office/drawing/2014/main" id="{366C5B9B-4218-DF7D-B165-C49A67F7FF56}"/>
+              </a:ext>
+            </a:extLst>
+          </p:cNvPr>
+          <p:cNvSpPr txBox="1"/>
+          <p:nvPr/>
+        </p:nvSpPr>
+        <p:spPr>
+          <a:xfrm rot="21325976">
+            <a:off x="4526929" y="3819795"/>
+            <a:ext cx="1360170" cy="307777"/>
+          </a:xfrm>
+          <a:prstGeom prst="rect">
+            <a:avLst/>
+          </a:prstGeom>
+          <a:noFill/>
+        </p:spPr>
+        <p:txBody>
+          <a:bodyPr wrap="square" rtlCol="0">
+            <a:spAutoFit/>
+          </a:bodyPr>
+          <a:lstStyle/>
+          <a:p>
+            <a:r>
+              <a:rPr lang="en-CL" sz="1400" dirty="0">
+                <a:solidFill>
+                  <a:schemeClr val="bg1"/>
+                </a:solidFill>
+              </a:rPr>
+              <a:t>Niebla</a:t>
+            </a:r>
+          </a:p>
+        </p:txBody>
+      </p:sp>
+      <p:sp>
+        <p:nvSpPr>
+          <p:cNvPr id="22" name="Oval 21">
+            <a:extLst>
+              <a:ext uri="{FF2B5EF4-FFF2-40B4-BE49-F238E27FC236}">
+                <a16:creationId xmlns:a16="http://schemas.microsoft.com/office/drawing/2014/main" id="{887C4C2A-7EED-8CEC-E575-2547FB06FD9F}"/>
+              </a:ext>
+            </a:extLst>
+          </p:cNvPr>
+          <p:cNvSpPr/>
+          <p:nvPr/>
+        </p:nvSpPr>
+        <p:spPr>
+          <a:xfrm>
+            <a:off x="6325757" y="3941132"/>
+            <a:ext cx="48720" cy="47100"/>
+          </a:xfrm>
+          <a:prstGeom prst="ellipse">
+            <a:avLst/>
+          </a:prstGeom>
+          <a:solidFill>
+            <a:schemeClr val="tx2">
+              <a:lumMod val="10000"/>
+              <a:lumOff val="90000"/>
+            </a:schemeClr>
+          </a:solidFill>
+          <a:ln w="3175">
+            <a:solidFill>
+              <a:schemeClr val="bg1"/>
+            </a:solidFill>
+          </a:ln>
+        </p:spPr>
+        <p:style>
+          <a:lnRef idx="2">
+            <a:schemeClr val="accent1">
+              <a:shade val="15000"/>
+            </a:schemeClr>
+          </a:lnRef>
+          <a:fillRef idx="1">
+            <a:schemeClr val="accent1"/>
+          </a:fillRef>
+          <a:effectRef idx="0">
+            <a:schemeClr val="accent1"/>
+          </a:effectRef>
+          <a:fontRef idx="minor">
+            <a:schemeClr val="lt1"/>
+          </a:fontRef>
+        </p:style>
+        <p:txBody>
+          <a:bodyPr rtlCol="0" anchor="ctr"/>
+          <a:lstStyle/>
+          <a:p>
+            <a:pPr algn="ctr"/>
+            <a:endParaRPr lang="en-CL"/>
+          </a:p>
+        </p:txBody>
+      </p:sp>
+      <p:sp>
+        <p:nvSpPr>
+          <p:cNvPr id="23" name="TextBox 22">
+            <a:extLst>
+              <a:ext uri="{FF2B5EF4-FFF2-40B4-BE49-F238E27FC236}">
+                <a16:creationId xmlns:a16="http://schemas.microsoft.com/office/drawing/2014/main" id="{16C7C52C-41FD-AD68-F60F-017021065801}"/>
+              </a:ext>
+            </a:extLst>
+          </p:cNvPr>
+          <p:cNvSpPr txBox="1"/>
+          <p:nvPr/>
+        </p:nvSpPr>
+        <p:spPr>
+          <a:xfrm>
+            <a:off x="8125132" y="5819520"/>
+            <a:ext cx="1668868" cy="246221"/>
+          </a:xfrm>
+          <a:prstGeom prst="rect">
+            <a:avLst/>
+          </a:prstGeom>
+          <a:noFill/>
+        </p:spPr>
+        <p:txBody>
+          <a:bodyPr wrap="square" rtlCol="0">
+            <a:spAutoFit/>
+          </a:bodyPr>
+          <a:lstStyle/>
+          <a:p>
+            <a:r>
+              <a:rPr lang="en-CL" sz="1000" b="1" i="1" dirty="0">
+                <a:solidFill>
+                  <a:schemeClr val="bg1"/>
+                </a:solidFill>
+              </a:rPr>
+              <a:t>Tillandsia landbeckii</a:t>
+            </a:r>
+          </a:p>
+        </p:txBody>
+      </p:sp>
+      <p:cxnSp>
+        <p:nvCxnSpPr>
+          <p:cNvPr id="24" name="Curved Connector 23">
+            <a:extLst>
+              <a:ext uri="{FF2B5EF4-FFF2-40B4-BE49-F238E27FC236}">
+                <a16:creationId xmlns:a16="http://schemas.microsoft.com/office/drawing/2014/main" id="{34D5F479-6961-8C03-A8BD-8D0F369C7839}"/>
+              </a:ext>
+            </a:extLst>
+          </p:cNvPr>
+          <p:cNvCxnSpPr>
+            <a:cxnSpLocks/>
+          </p:cNvCxnSpPr>
+          <p:nvPr/>
+        </p:nvCxnSpPr>
+        <p:spPr>
+          <a:xfrm rot="5400000" flipH="1" flipV="1">
+            <a:off x="8558587" y="6088377"/>
+            <a:ext cx="425604" cy="313556"/>
+          </a:xfrm>
+          <a:prstGeom prst="curvedConnector3">
+            <a:avLst>
+              <a:gd name="adj1" fmla="val 50000"/>
+            </a:avLst>
+          </a:prstGeom>
+          <a:ln>
+            <a:solidFill>
+              <a:schemeClr val="bg1"/>
+            </a:solidFill>
+            <a:tailEnd type="triangle"/>
+          </a:ln>
+        </p:spPr>
+        <p:style>
+          <a:lnRef idx="2">
+            <a:schemeClr val="accent1"/>
+          </a:lnRef>
+          <a:fillRef idx="0">
+            <a:schemeClr val="accent1"/>
+          </a:fillRef>
+          <a:effectRef idx="1">
+            <a:schemeClr val="accent1"/>
+          </a:effectRef>
+          <a:fontRef idx="minor">
+            <a:schemeClr val="tx1"/>
+          </a:fontRef>
+        </p:style>
+      </p:cxnSp>
+      <p:sp>
+        <p:nvSpPr>
+          <p:cNvPr id="26" name="TextBox 25">
+            <a:extLst>
+              <a:ext uri="{FF2B5EF4-FFF2-40B4-BE49-F238E27FC236}">
+                <a16:creationId xmlns:a16="http://schemas.microsoft.com/office/drawing/2014/main" id="{96EE1D47-C127-DCF5-6A33-0943C711BBE9}"/>
+              </a:ext>
+            </a:extLst>
+          </p:cNvPr>
+          <p:cNvSpPr txBox="1"/>
+          <p:nvPr/>
+        </p:nvSpPr>
+        <p:spPr>
+          <a:xfrm>
+            <a:off x="758283" y="214352"/>
+            <a:ext cx="3993541" cy="369332"/>
+          </a:xfrm>
+          <a:prstGeom prst="rect">
+            <a:avLst/>
+          </a:prstGeom>
+          <a:noFill/>
+        </p:spPr>
+        <p:txBody>
+          <a:bodyPr wrap="square" rtlCol="0">
+            <a:spAutoFit/>
+          </a:bodyPr>
+          <a:lstStyle/>
+          <a:p>
+            <a:r>
+              <a:rPr lang="en-CL" b="1" dirty="0">
+                <a:solidFill>
+                  <a:schemeClr val="bg1"/>
+                </a:solidFill>
+              </a:rPr>
+              <a:t>Estación OYA1211, Cerro Oyarbide</a:t>
+            </a:r>
+          </a:p>
+        </p:txBody>
+      </p:sp>
     </p:spTree>
     <p:extLst>
       <p:ext uri="{BB962C8B-B14F-4D97-AF65-F5344CB8AC3E}">
